--- a/resources/year8/L12_Sequences_Unit_Review.pptx
+++ b/resources/year8/L12_Sequences_Unit_Review.pptx
@@ -6369,8 +6369,8 @@
         </p:nvSpPr>
         <p:spPr>
           <a:xfrm>
-            <a:off x="457200" y="777240"/>
-            <a:ext cx="11277295" cy="640080"/>
+            <a:off x="457200" y="685800"/>
+            <a:ext cx="11277295" cy="457200"/>
           </a:xfrm>
           <a:prstGeom prst="rect">
             <a:avLst/>
@@ -6392,7 +6392,7 @@
               </a:spcAft>
             </a:pPr>
             <a:r>
-              <a:rPr sz="3400" b="1" i="0">
+              <a:rPr sz="2800" b="1" i="0">
                 <a:solidFill>
                   <a:srgbClr val="000000"/>
                 </a:solidFill>
@@ -6411,8 +6411,8 @@
         </p:nvSpPr>
         <p:spPr>
           <a:xfrm>
-            <a:off x="457200" y="1645920"/>
-            <a:ext cx="11277295" cy="2926080"/>
+            <a:off x="457200" y="1170432"/>
+            <a:ext cx="11277295" cy="502920"/>
           </a:xfrm>
           <a:prstGeom prst="rect">
             <a:avLst/>
@@ -6430,69 +6430,295 @@
                 <a:spcPts val="0"/>
               </a:spcBef>
               <a:spcAft>
-                <a:spcPts val="1200"/>
+                <a:spcPts val="0"/>
               </a:spcAft>
             </a:pPr>
             <a:r>
-              <a:rPr sz="2200" b="0" i="0">
+              <a:rPr sz="1300" b="0" i="1">
+                <a:solidFill>
+                  <a:srgbClr val="595959"/>
+                </a:solidFill>
+                <a:latin typeface="Arial"/>
+              </a:rPr>
+              <a:t>Whole-class team quiz covering the whole unit. Teams buzz in or hold up whiteboards — fastest correct answer scores.</a:t>
+            </a:r>
+          </a:p>
+        </p:txBody>
+      </p:sp>
+      <p:sp>
+        <p:nvSpPr>
+          <p:cNvPr id="6" name="TextBox 5"/>
+          <p:cNvSpPr txBox="1"/>
+          <p:nvPr/>
+        </p:nvSpPr>
+        <p:spPr>
+          <a:xfrm>
+            <a:off x="457200" y="1874519"/>
+            <a:ext cx="5455767" cy="1295400"/>
+          </a:xfrm>
+          <a:prstGeom prst="rect">
+            <a:avLst/>
+          </a:prstGeom>
+          <a:noFill/>
+        </p:spPr>
+        <p:txBody>
+          <a:bodyPr wrap="square" anchor="ctr" lIns="0" rIns="0" tIns="0" bIns="0">
+            <a:spAutoFit/>
+          </a:bodyPr>
+          <a:lstStyle/>
+          <a:p>
+            <a:pPr algn="l"/>
+            <a:r>
+              <a:rPr sz="1500" b="1" i="0">
                 <a:solidFill>
                   <a:srgbClr val="000000"/>
                 </a:solidFill>
                 <a:latin typeface="Arial"/>
               </a:rPr>
-              <a:t>-  Whole-class team quiz: 6 rapid-fire questions covering the whole unit — term-to-term, nth term, special sequences, spotting quadratics.</a:t>
-            </a:r>
-          </a:p>
-          <a:p>
-            <a:pPr algn="l">
-              <a:spcBef>
-                <a:spcPts val="0"/>
-              </a:spcBef>
-              <a:spcAft>
-                <a:spcPts val="1200"/>
-              </a:spcAft>
-            </a:pPr>
-            <a:r>
-              <a:rPr sz="2200" b="0" i="0">
+              <a:t>1. Find the term-to-term rule: 6, 13, 20, 27   </a:t>
+            </a:r>
+            <a:r>
+              <a:rPr sz="1500" b="1" i="0">
+                <a:solidFill>
+                  <a:srgbClr val="2B6B3D"/>
+                </a:solidFill>
+                <a:latin typeface="Arial"/>
+              </a:rPr>
+              <a:t>+7</a:t>
+            </a:r>
+          </a:p>
+        </p:txBody>
+      </p:sp>
+      <p:sp>
+        <p:nvSpPr>
+          <p:cNvPr id="7" name="TextBox 6"/>
+          <p:cNvSpPr txBox="1"/>
+          <p:nvPr/>
+        </p:nvSpPr>
+        <p:spPr>
+          <a:xfrm>
+            <a:off x="457200" y="3169919"/>
+            <a:ext cx="5455767" cy="1295400"/>
+          </a:xfrm>
+          <a:prstGeom prst="rect">
+            <a:avLst/>
+          </a:prstGeom>
+          <a:noFill/>
+        </p:spPr>
+        <p:txBody>
+          <a:bodyPr wrap="square" anchor="ctr" lIns="0" rIns="0" tIns="0" bIns="0">
+            <a:spAutoFit/>
+          </a:bodyPr>
+          <a:lstStyle/>
+          <a:p>
+            <a:pPr algn="l"/>
+            <a:r>
+              <a:rPr sz="1500" b="1" i="0">
                 <a:solidFill>
                   <a:srgbClr val="000000"/>
                 </a:solidFill>
                 <a:latin typeface="Arial"/>
               </a:rPr>
-              <a:t>-  Teams buzz in or hold up whiteboards to answer — fastest correct answer scores.</a:t>
-            </a:r>
-          </a:p>
-          <a:p>
-            <a:pPr algn="l">
-              <a:spcBef>
-                <a:spcPts val="0"/>
-              </a:spcBef>
-              <a:spcAft>
-                <a:spcPts val="1200"/>
-              </a:spcAft>
-            </a:pPr>
-            <a:r>
-              <a:rPr sz="2200" b="0" i="0">
+              <a:t>2. Find the nth term: 4, 7, 10, 13   </a:t>
+            </a:r>
+            <a:r>
+              <a:rPr sz="1500" b="1" i="0">
+                <a:solidFill>
+                  <a:srgbClr val="2B6B3D"/>
+                </a:solidFill>
+                <a:latin typeface="Arial"/>
+              </a:rPr>
+              <a:t>3n + 1</a:t>
+            </a:r>
+          </a:p>
+        </p:txBody>
+      </p:sp>
+      <p:sp>
+        <p:nvSpPr>
+          <p:cNvPr id="8" name="TextBox 7"/>
+          <p:cNvSpPr txBox="1"/>
+          <p:nvPr/>
+        </p:nvSpPr>
+        <p:spPr>
+          <a:xfrm>
+            <a:off x="457200" y="4465319"/>
+            <a:ext cx="5455767" cy="1295400"/>
+          </a:xfrm>
+          <a:prstGeom prst="rect">
+            <a:avLst/>
+          </a:prstGeom>
+          <a:noFill/>
+        </p:spPr>
+        <p:txBody>
+          <a:bodyPr wrap="square" anchor="ctr" lIns="0" rIns="0" tIns="0" bIns="0">
+            <a:spAutoFit/>
+          </a:bodyPr>
+          <a:lstStyle/>
+          <a:p>
+            <a:pPr algn="l"/>
+            <a:r>
+              <a:rPr sz="1500" b="1" i="0">
                 <a:solidFill>
                   <a:srgbClr val="000000"/>
                 </a:solidFill>
                 <a:latin typeface="Arial"/>
               </a:rPr>
-              <a:t>-  Finish with a traffic-light self-assessment: green, amber or red on each key skill from the unit.</a:t>
-            </a:r>
-          </a:p>
-        </p:txBody>
-      </p:sp>
-      <p:sp>
-        <p:nvSpPr>
-          <p:cNvPr id="6" name="Rounded Rectangle 5"/>
+              <a:t>3. Is 45 a triangular number?   </a:t>
+            </a:r>
+            <a:r>
+              <a:rPr sz="1500" b="1" i="0">
+                <a:solidFill>
+                  <a:srgbClr val="2B6B3D"/>
+                </a:solidFill>
+                <a:latin typeface="Arial"/>
+              </a:rPr>
+              <a:t>Yes (T9 = 45)</a:t>
+            </a:r>
+          </a:p>
+        </p:txBody>
+      </p:sp>
+      <p:sp>
+        <p:nvSpPr>
+          <p:cNvPr id="9" name="TextBox 8"/>
+          <p:cNvSpPr txBox="1"/>
+          <p:nvPr/>
+        </p:nvSpPr>
+        <p:spPr>
+          <a:xfrm>
+            <a:off x="6278727" y="1874519"/>
+            <a:ext cx="5455767" cy="1295400"/>
+          </a:xfrm>
+          <a:prstGeom prst="rect">
+            <a:avLst/>
+          </a:prstGeom>
+          <a:noFill/>
+        </p:spPr>
+        <p:txBody>
+          <a:bodyPr wrap="square" anchor="ctr" lIns="0" rIns="0" tIns="0" bIns="0">
+            <a:spAutoFit/>
+          </a:bodyPr>
+          <a:lstStyle/>
+          <a:p>
+            <a:pPr algn="l"/>
+            <a:r>
+              <a:rPr sz="1500" b="1" i="0">
+                <a:solidFill>
+                  <a:srgbClr val="000000"/>
+                </a:solidFill>
+                <a:latin typeface="Arial"/>
+              </a:rPr>
+              <a:t>4. nth term 5n − 2: find the 10th term   </a:t>
+            </a:r>
+            <a:r>
+              <a:rPr sz="1500" b="1" i="0">
+                <a:solidFill>
+                  <a:srgbClr val="2B6B3D"/>
+                </a:solidFill>
+                <a:latin typeface="Arial"/>
+              </a:rPr>
+              <a:t>48</a:t>
+            </a:r>
+          </a:p>
+        </p:txBody>
+      </p:sp>
+      <p:sp>
+        <p:nvSpPr>
+          <p:cNvPr id="10" name="TextBox 9"/>
+          <p:cNvSpPr txBox="1"/>
+          <p:nvPr/>
+        </p:nvSpPr>
+        <p:spPr>
+          <a:xfrm>
+            <a:off x="6278727" y="3169919"/>
+            <a:ext cx="5455767" cy="1295400"/>
+          </a:xfrm>
+          <a:prstGeom prst="rect">
+            <a:avLst/>
+          </a:prstGeom>
+          <a:noFill/>
+        </p:spPr>
+        <p:txBody>
+          <a:bodyPr wrap="square" anchor="ctr" lIns="0" rIns="0" tIns="0" bIns="0">
+            <a:spAutoFit/>
+          </a:bodyPr>
+          <a:lstStyle/>
+          <a:p>
+            <a:pPr algn="l"/>
+            <a:r>
+              <a:rPr sz="1500" b="1" i="0">
+                <a:solidFill>
+                  <a:srgbClr val="000000"/>
+                </a:solidFill>
+                <a:latin typeface="Arial"/>
+              </a:rPr>
+              <a:t>5. nth term 6n + 1: is 43 in the sequence?   </a:t>
+            </a:r>
+            <a:r>
+              <a:rPr sz="1500" b="1" i="0">
+                <a:solidFill>
+                  <a:srgbClr val="2B6B3D"/>
+                </a:solidFill>
+                <a:latin typeface="Arial"/>
+              </a:rPr>
+              <a:t>Yes (n = 7)</a:t>
+            </a:r>
+          </a:p>
+        </p:txBody>
+      </p:sp>
+      <p:sp>
+        <p:nvSpPr>
+          <p:cNvPr id="11" name="TextBox 10"/>
+          <p:cNvSpPr txBox="1"/>
+          <p:nvPr/>
+        </p:nvSpPr>
+        <p:spPr>
+          <a:xfrm>
+            <a:off x="6278727" y="4465319"/>
+            <a:ext cx="5455767" cy="1295400"/>
+          </a:xfrm>
+          <a:prstGeom prst="rect">
+            <a:avLst/>
+          </a:prstGeom>
+          <a:noFill/>
+        </p:spPr>
+        <p:txBody>
+          <a:bodyPr wrap="square" anchor="ctr" lIns="0" rIns="0" tIns="0" bIns="0">
+            <a:spAutoFit/>
+          </a:bodyPr>
+          <a:lstStyle/>
+          <a:p>
+            <a:pPr algn="l"/>
+            <a:r>
+              <a:rPr sz="1500" b="1" i="0">
+                <a:solidFill>
+                  <a:srgbClr val="000000"/>
+                </a:solidFill>
+                <a:latin typeface="Arial"/>
+              </a:rPr>
+              <a:t>6. 1, 4, 9, 16 — linear or quadratic?   </a:t>
+            </a:r>
+            <a:r>
+              <a:rPr sz="1500" b="1" i="0">
+                <a:solidFill>
+                  <a:srgbClr val="2B6B3D"/>
+                </a:solidFill>
+                <a:latin typeface="Arial"/>
+              </a:rPr>
+              <a:t>Quadratic (2nd difference = 2)</a:t>
+            </a:r>
+          </a:p>
+        </p:txBody>
+      </p:sp>
+      <p:sp>
+        <p:nvSpPr>
+          <p:cNvPr id="12" name="Rounded Rectangle 11"/>
           <p:cNvSpPr/>
           <p:nvPr/>
         </p:nvSpPr>
         <p:spPr>
           <a:xfrm>
-            <a:off x="457200" y="4937760"/>
-            <a:ext cx="11277295" cy="1097280"/>
+            <a:off x="457200" y="5897880"/>
+            <a:ext cx="11277295" cy="548640"/>
           </a:xfrm>
           <a:prstGeom prst="roundRect">
             <a:avLst/>
@@ -6527,7 +6753,7 @@
           <a:p>
             <a:pPr algn="ctr"/>
             <a:r>
-              <a:rPr sz="2200" b="1" i="0">
+              <a:rPr sz="1600" b="1" i="0">
                 <a:solidFill>
                   <a:srgbClr val="000000"/>
                 </a:solidFill>
@@ -6540,7 +6766,7 @@
       </p:sp>
       <p:sp>
         <p:nvSpPr>
-          <p:cNvPr id="7" name="TextBox 6"/>
+          <p:cNvPr id="13" name="TextBox 12"/>
           <p:cNvSpPr txBox="1"/>
           <p:nvPr/>
         </p:nvSpPr>
